--- a/S4_claude-style.pptx
+++ b/S4_claude-style.pptx
@@ -3331,10 +3331,56 @@
         <p:spPr>
           <a:xfrm>
             <a:off x="0" y="0"/>
-            <a:ext cx="256032" cy="6858000"/>
-          </a:xfrm>
-          <a:prstGeom prst="rect">
-            <a:avLst/>
+            <a:ext cx="12191695" cy="6858000"/>
+          </a:xfrm>
+          <a:prstGeom prst="rect">
+            <a:avLst/>
+          </a:prstGeom>
+          <a:solidFill>
+            <a:srgbClr val="FAF9F5"/>
+          </a:solidFill>
+          <a:ln>
+            <a:noFill/>
+          </a:ln>
+          <a:effectLst/>
+        </p:spPr>
+        <p:style>
+          <a:lnRef idx="1">
+            <a:schemeClr val="accent1"/>
+          </a:lnRef>
+          <a:fillRef idx="3">
+            <a:schemeClr val="accent1"/>
+          </a:fillRef>
+          <a:effectRef idx="2">
+            <a:schemeClr val="accent1"/>
+          </a:effectRef>
+          <a:fontRef idx="minor">
+            <a:schemeClr val="lt1"/>
+          </a:fontRef>
+        </p:style>
+        <p:txBody>
+          <a:bodyPr rtlCol="0" anchor="ctr"/>
+          <a:lstStyle/>
+          <a:p>
+            <a:pPr algn="ctr"/>
+          </a:p>
+        </p:txBody>
+      </p:sp>
+      <p:sp>
+        <p:nvSpPr>
+          <p:cNvPr id="3" name="Rounded Rectangle 2"/>
+          <p:cNvSpPr/>
+          <p:nvPr/>
+        </p:nvSpPr>
+        <p:spPr>
+          <a:xfrm>
+            <a:off x="658368" y="548640"/>
+            <a:ext cx="118872" cy="118872"/>
+          </a:xfrm>
+          <a:prstGeom prst="roundRect">
+            <a:avLst>
+              <a:gd name="adj" fmla="val 25000"/>
+            </a:avLst>
           </a:prstGeom>
           <a:solidFill>
             <a:srgbClr val="F37021"/>
@@ -3368,39 +3414,70 @@
       </p:sp>
       <p:sp>
         <p:nvSpPr>
-          <p:cNvPr id="3" name="TextBox 2"/>
-          <p:cNvSpPr txBox="1"/>
-          <p:nvPr/>
-        </p:nvSpPr>
-        <p:spPr>
-          <a:xfrm>
-            <a:off x="868680" y="777240"/>
-            <a:ext cx="9144000" cy="365760"/>
-          </a:xfrm>
-          <a:prstGeom prst="rect">
-            <a:avLst/>
-          </a:prstGeom>
-          <a:noFill/>
-        </p:spPr>
-        <p:txBody>
-          <a:bodyPr wrap="square" lIns="25400" rIns="25400" tIns="12700" bIns="12700" anchor="t">
-            <a:spAutoFit/>
-          </a:bodyPr>
-          <a:lstStyle/>
-          <a:p>
-            <a:pPr algn="l">
-              <a:lnSpc>
-                <a:spcPct val="115000"/>
-              </a:lnSpc>
-            </a:pPr>
-            <a:r>
-              <a:rPr sz="1200" b="1" i="0" spc="350">
-                <a:solidFill>
-                  <a:srgbClr val="8E8B82"/>
-                </a:solidFill>
-                <a:latin typeface="맑은 고딕"/>
-                <a:ea typeface="맑은 고딕"/>
-                <a:cs typeface="맑은 고딕"/>
+          <p:cNvPr id="4" name="TextBox 3"/>
+          <p:cNvSpPr txBox="1"/>
+          <p:nvPr/>
+        </p:nvSpPr>
+        <p:spPr>
+          <a:xfrm>
+            <a:off x="868680" y="502920"/>
+            <a:ext cx="6400800" cy="274320"/>
+          </a:xfrm>
+          <a:prstGeom prst="rect">
+            <a:avLst/>
+          </a:prstGeom>
+          <a:noFill/>
+        </p:spPr>
+        <p:txBody>
+          <a:bodyPr wrap="square" anchor="t" lIns="0" rIns="0" tIns="0" bIns="0">
+            <a:spAutoFit/>
+          </a:bodyPr>
+          <a:lstStyle/>
+          <a:p>
+            <a:pPr algn="l"/>
+            <a:r>
+              <a:rPr sz="1100" b="0" spc="150">
+                <a:solidFill>
+                  <a:srgbClr val="6C6A64"/>
+                </a:solidFill>
+                <a:latin typeface="맑은 고딕"/>
+                <a:ea typeface="맑은 고딕"/>
+              </a:rPr>
+              <a:t>AI 검색 시대 마케팅 — SEO·AEO·GEO 6강 완성 과정</a:t>
+            </a:r>
+          </a:p>
+        </p:txBody>
+      </p:sp>
+      <p:sp>
+        <p:nvSpPr>
+          <p:cNvPr id="5" name="TextBox 4"/>
+          <p:cNvSpPr txBox="1"/>
+          <p:nvPr/>
+        </p:nvSpPr>
+        <p:spPr>
+          <a:xfrm>
+            <a:off x="6400800" y="502920"/>
+            <a:ext cx="5148072" cy="274320"/>
+          </a:xfrm>
+          <a:prstGeom prst="rect">
+            <a:avLst/>
+          </a:prstGeom>
+          <a:noFill/>
+        </p:spPr>
+        <p:txBody>
+          <a:bodyPr wrap="square" anchor="t" lIns="0" rIns="0" tIns="0" bIns="0">
+            <a:spAutoFit/>
+          </a:bodyPr>
+          <a:lstStyle/>
+          <a:p>
+            <a:pPr algn="r"/>
+            <a:r>
+              <a:rPr sz="1100" b="0" spc="150">
+                <a:solidFill>
+                  <a:srgbClr val="6C6A64"/>
+                </a:solidFill>
+                <a:latin typeface="맑은 고딕"/>
+                <a:ea typeface="맑은 고딕"/>
               </a:rPr>
               <a:t>SESSION 4 / 6</a:t>
             </a:r>
@@ -3409,41 +3486,160 @@
       </p:sp>
       <p:sp>
         <p:nvSpPr>
-          <p:cNvPr id="4" name="TextBox 3"/>
-          <p:cNvSpPr txBox="1"/>
-          <p:nvPr/>
-        </p:nvSpPr>
-        <p:spPr>
-          <a:xfrm>
-            <a:off x="6720840" y="274320"/>
-            <a:ext cx="4937760" cy="2926080"/>
+          <p:cNvPr id="6" name="Rectangle 5"/>
+          <p:cNvSpPr/>
+          <p:nvPr/>
+        </p:nvSpPr>
+        <p:spPr>
+          <a:xfrm>
+            <a:off x="658368" y="841248"/>
+            <a:ext cx="10890504" cy="10972"/>
+          </a:xfrm>
+          <a:prstGeom prst="rect">
+            <a:avLst/>
+          </a:prstGeom>
+          <a:solidFill>
+            <a:srgbClr val="E6DFD8"/>
+          </a:solidFill>
+          <a:ln>
+            <a:noFill/>
+          </a:ln>
+          <a:effectLst/>
+        </p:spPr>
+        <p:style>
+          <a:lnRef idx="1">
+            <a:schemeClr val="accent1"/>
+          </a:lnRef>
+          <a:fillRef idx="3">
+            <a:schemeClr val="accent1"/>
+          </a:fillRef>
+          <a:effectRef idx="2">
+            <a:schemeClr val="accent1"/>
+          </a:effectRef>
+          <a:fontRef idx="minor">
+            <a:schemeClr val="lt1"/>
+          </a:fontRef>
+        </p:style>
+        <p:txBody>
+          <a:bodyPr rtlCol="0" anchor="ctr"/>
+          <a:lstStyle/>
+          <a:p>
+            <a:pPr algn="ctr"/>
+          </a:p>
+        </p:txBody>
+      </p:sp>
+      <p:sp>
+        <p:nvSpPr>
+          <p:cNvPr id="7" name="Rounded Rectangle 6"/>
+          <p:cNvSpPr/>
+          <p:nvPr/>
+        </p:nvSpPr>
+        <p:spPr>
+          <a:xfrm>
+            <a:off x="8183879" y="1371600"/>
+            <a:ext cx="3364992" cy="4114800"/>
           </a:xfrm>
           <a:prstGeom prst="roundRect">
             <a:avLst>
-              <a:gd name="adj" fmla="val 5000"/>
+              <a:gd name="adj" fmla="val 7000"/>
             </a:avLst>
           </a:prstGeom>
-          <a:noFill/>
-        </p:spPr>
-        <p:txBody>
-          <a:bodyPr wrap="square" lIns="25400" rIns="25400" tIns="12700" bIns="12700" anchor="t">
-            <a:spAutoFit/>
-          </a:bodyPr>
-          <a:lstStyle/>
-          <a:p>
-            <a:pPr algn="r">
-              <a:lnSpc>
-                <a:spcPct val="90000"/>
-              </a:lnSpc>
-            </a:pPr>
-            <a:r>
-              <a:rPr sz="20000" b="1" i="0">
-                <a:solidFill>
-                  <a:srgbClr val="181715"/>
-                </a:solidFill>
-                <a:latin typeface="맑은 고딕"/>
-                <a:ea typeface="맑은 고딕"/>
-                <a:cs typeface="맑은 고딕"/>
+          <a:solidFill>
+            <a:srgbClr val="181715"/>
+          </a:solidFill>
+          <a:ln>
+            <a:noFill/>
+          </a:ln>
+          <a:effectLst/>
+        </p:spPr>
+        <p:style>
+          <a:lnRef idx="1">
+            <a:schemeClr val="accent1"/>
+          </a:lnRef>
+          <a:fillRef idx="3">
+            <a:schemeClr val="accent1"/>
+          </a:fillRef>
+          <a:effectRef idx="2">
+            <a:schemeClr val="accent1"/>
+          </a:effectRef>
+          <a:fontRef idx="minor">
+            <a:schemeClr val="lt1"/>
+          </a:fontRef>
+        </p:style>
+        <p:txBody>
+          <a:bodyPr rtlCol="0" anchor="ctr"/>
+          <a:lstStyle/>
+          <a:p>
+            <a:pPr algn="ctr"/>
+          </a:p>
+        </p:txBody>
+      </p:sp>
+      <p:sp>
+        <p:nvSpPr>
+          <p:cNvPr id="8" name="TextBox 7"/>
+          <p:cNvSpPr txBox="1"/>
+          <p:nvPr/>
+        </p:nvSpPr>
+        <p:spPr>
+          <a:xfrm>
+            <a:off x="8494776" y="1682496"/>
+            <a:ext cx="2816352" cy="274320"/>
+          </a:xfrm>
+          <a:prstGeom prst="rect">
+            <a:avLst/>
+          </a:prstGeom>
+          <a:noFill/>
+        </p:spPr>
+        <p:txBody>
+          <a:bodyPr wrap="square" anchor="t" lIns="0" rIns="0" tIns="0" bIns="0">
+            <a:spAutoFit/>
+          </a:bodyPr>
+          <a:lstStyle/>
+          <a:p>
+            <a:pPr algn="l"/>
+            <a:r>
+              <a:rPr sz="1200" b="0" spc="300">
+                <a:solidFill>
+                  <a:srgbClr val="A09D96"/>
+                </a:solidFill>
+                <a:latin typeface="맑은 고딕"/>
+                <a:ea typeface="맑은 고딕"/>
+              </a:rPr>
+              <a:t>SESSION</a:t>
+            </a:r>
+          </a:p>
+        </p:txBody>
+      </p:sp>
+      <p:sp>
+        <p:nvSpPr>
+          <p:cNvPr id="9" name="TextBox 8"/>
+          <p:cNvSpPr txBox="1"/>
+          <p:nvPr/>
+        </p:nvSpPr>
+        <p:spPr>
+          <a:xfrm>
+            <a:off x="8183879" y="1508760"/>
+            <a:ext cx="3364992" cy="3931920"/>
+          </a:xfrm>
+          <a:prstGeom prst="rect">
+            <a:avLst/>
+          </a:prstGeom>
+          <a:noFill/>
+        </p:spPr>
+        <p:txBody>
+          <a:bodyPr wrap="square" anchor="ctr" lIns="0" rIns="0" tIns="0" bIns="0">
+            <a:spAutoFit/>
+          </a:bodyPr>
+          <a:lstStyle/>
+          <a:p>
+            <a:pPr algn="ctr"/>
+            <a:r>
+              <a:rPr sz="15000" b="1">
+                <a:solidFill>
+                  <a:srgbClr val="FAF9F5"/>
+                </a:solidFill>
+                <a:latin typeface="맑은 고딕"/>
+                <a:ea typeface="맑은 고딕"/>
               </a:rPr>
               <a:t>04</a:t>
             </a:r>
@@ -3452,60 +3648,154 @@
       </p:sp>
       <p:sp>
         <p:nvSpPr>
-          <p:cNvPr id="5" name="TextBox 4"/>
-          <p:cNvSpPr txBox="1"/>
-          <p:nvPr/>
-        </p:nvSpPr>
-        <p:spPr>
-          <a:xfrm>
-            <a:off x="822960" y="1554480"/>
-            <a:ext cx="9601200" cy="1828800"/>
-          </a:xfrm>
-          <a:prstGeom prst="rect">
-            <a:avLst/>
-          </a:prstGeom>
-          <a:noFill/>
-        </p:spPr>
-        <p:txBody>
-          <a:bodyPr wrap="square" lIns="25400" rIns="25400" tIns="12700" bIns="12700" anchor="t">
-            <a:spAutoFit/>
-          </a:bodyPr>
-          <a:lstStyle/>
-          <a:p>
-            <a:pPr algn="l">
-              <a:lnSpc>
-                <a:spcPct val="115000"/>
-              </a:lnSpc>
-              <a:spcAft>
-                <a:spcPts val="1000"/>
-              </a:spcAft>
-            </a:pPr>
-            <a:r>
-              <a:rPr sz="1300" b="1" i="0" spc="200">
-                <a:solidFill>
-                  <a:srgbClr val="8E8B82"/>
-                </a:solidFill>
-                <a:latin typeface="맑은 고딕"/>
-                <a:ea typeface="맑은 고딕"/>
-                <a:cs typeface="맑은 고딕"/>
+          <p:cNvPr id="10" name="Rectangle 9"/>
+          <p:cNvSpPr/>
+          <p:nvPr/>
+        </p:nvSpPr>
+        <p:spPr>
+          <a:xfrm>
+            <a:off x="8494776" y="4617720"/>
+            <a:ext cx="2743200" cy="10972"/>
+          </a:xfrm>
+          <a:prstGeom prst="rect">
+            <a:avLst/>
+          </a:prstGeom>
+          <a:solidFill>
+            <a:srgbClr val="2A2824"/>
+          </a:solidFill>
+          <a:ln>
+            <a:noFill/>
+          </a:ln>
+          <a:effectLst/>
+        </p:spPr>
+        <p:style>
+          <a:lnRef idx="1">
+            <a:schemeClr val="accent1"/>
+          </a:lnRef>
+          <a:fillRef idx="3">
+            <a:schemeClr val="accent1"/>
+          </a:fillRef>
+          <a:effectRef idx="2">
+            <a:schemeClr val="accent1"/>
+          </a:effectRef>
+          <a:fontRef idx="minor">
+            <a:schemeClr val="lt1"/>
+          </a:fontRef>
+        </p:style>
+        <p:txBody>
+          <a:bodyPr rtlCol="0" anchor="ctr"/>
+          <a:lstStyle/>
+          <a:p>
+            <a:pPr algn="ctr"/>
+          </a:p>
+        </p:txBody>
+      </p:sp>
+      <p:sp>
+        <p:nvSpPr>
+          <p:cNvPr id="11" name="TextBox 10"/>
+          <p:cNvSpPr txBox="1"/>
+          <p:nvPr/>
+        </p:nvSpPr>
+        <p:spPr>
+          <a:xfrm>
+            <a:off x="8494776" y="4773168"/>
+            <a:ext cx="2816352" cy="457200"/>
+          </a:xfrm>
+          <a:prstGeom prst="rect">
+            <a:avLst/>
+          </a:prstGeom>
+          <a:noFill/>
+        </p:spPr>
+        <p:txBody>
+          <a:bodyPr wrap="square" anchor="t" lIns="0" rIns="0" tIns="0" bIns="0">
+            <a:spAutoFit/>
+          </a:bodyPr>
+          <a:lstStyle/>
+          <a:p>
+            <a:pPr algn="l"/>
+            <a:r>
+              <a:rPr sz="1250" b="1" spc="100">
+                <a:solidFill>
+                  <a:srgbClr val="FAF9F5"/>
+                </a:solidFill>
+                <a:latin typeface="맑은 고딕"/>
+                <a:ea typeface="맑은 고딕"/>
               </a:rPr>
               <a:t>CONTENT SEO &amp; AEO</a:t>
             </a:r>
           </a:p>
-          <a:p>
-            <a:pPr algn="l">
-              <a:lnSpc>
-                <a:spcPct val="106000"/>
-              </a:lnSpc>
-            </a:pPr>
-            <a:r>
-              <a:rPr sz="3800" b="1" i="0">
+        </p:txBody>
+      </p:sp>
+      <p:sp>
+        <p:nvSpPr>
+          <p:cNvPr id="12" name="TextBox 11"/>
+          <p:cNvSpPr txBox="1"/>
+          <p:nvPr/>
+        </p:nvSpPr>
+        <p:spPr>
+          <a:xfrm>
+            <a:off x="676656" y="1755648"/>
+            <a:ext cx="7223760" cy="274320"/>
+          </a:xfrm>
+          <a:prstGeom prst="rect">
+            <a:avLst/>
+          </a:prstGeom>
+          <a:noFill/>
+        </p:spPr>
+        <p:txBody>
+          <a:bodyPr wrap="square" anchor="t" lIns="0" rIns="0" tIns="0" bIns="0">
+            <a:spAutoFit/>
+          </a:bodyPr>
+          <a:lstStyle/>
+          <a:p>
+            <a:pPr algn="l"/>
+            <a:r>
+              <a:rPr sz="1300" b="0" spc="250">
+                <a:solidFill>
+                  <a:srgbClr val="6C6A64"/>
+                </a:solidFill>
+                <a:latin typeface="맑은 고딕"/>
+                <a:ea typeface="맑은 고딕"/>
+              </a:rPr>
+              <a:t>CONTENT SEO &amp; AEO</a:t>
+            </a:r>
+          </a:p>
+        </p:txBody>
+      </p:sp>
+      <p:sp>
+        <p:nvSpPr>
+          <p:cNvPr id="13" name="TextBox 12"/>
+          <p:cNvSpPr txBox="1"/>
+          <p:nvPr/>
+        </p:nvSpPr>
+        <p:spPr>
+          <a:xfrm>
+            <a:off x="658368" y="2121408"/>
+            <a:ext cx="7269480" cy="1371600"/>
+          </a:xfrm>
+          <a:prstGeom prst="rect">
+            <a:avLst/>
+          </a:prstGeom>
+          <a:noFill/>
+        </p:spPr>
+        <p:txBody>
+          <a:bodyPr wrap="square" anchor="t" lIns="0" rIns="0" tIns="0" bIns="0">
+            <a:spAutoFit/>
+          </a:bodyPr>
+          <a:lstStyle/>
+          <a:p>
+            <a:pPr algn="l">
+              <a:lnSpc>
+                <a:spcPct val="105000"/>
+              </a:lnSpc>
+            </a:pPr>
+            <a:r>
+              <a:rPr sz="3700" b="1">
                 <a:solidFill>
                   <a:srgbClr val="141413"/>
                 </a:solidFill>
                 <a:latin typeface="맑은 고딕"/>
                 <a:ea typeface="맑은 고딕"/>
-                <a:cs typeface="맑은 고딕"/>
               </a:rPr>
               <a:t>콘텐츠 SEO &amp; AEO 실전</a:t>
             </a:r>
@@ -3514,17 +3804,19 @@
       </p:sp>
       <p:sp>
         <p:nvSpPr>
-          <p:cNvPr id="6" name="Rectangle 5"/>
+          <p:cNvPr id="14" name="Rounded Rectangle 13"/>
           <p:cNvSpPr/>
           <p:nvPr/>
         </p:nvSpPr>
         <p:spPr>
           <a:xfrm>
-            <a:off x="868680" y="3611880"/>
-            <a:ext cx="1828800" cy="23774"/>
-          </a:xfrm>
-          <a:prstGeom prst="rect">
-            <a:avLst/>
+            <a:off x="694944" y="3611880"/>
+            <a:ext cx="713232" cy="45720"/>
+          </a:xfrm>
+          <a:prstGeom prst="roundRect">
+            <a:avLst>
+              <a:gd name="adj" fmla="val 50000"/>
+            </a:avLst>
           </a:prstGeom>
           <a:solidFill>
             <a:srgbClr val="F37021"/>
@@ -3558,39 +3850,38 @@
       </p:sp>
       <p:sp>
         <p:nvSpPr>
-          <p:cNvPr id="7" name="TextBox 6"/>
-          <p:cNvSpPr txBox="1"/>
-          <p:nvPr/>
-        </p:nvSpPr>
-        <p:spPr>
-          <a:xfrm>
-            <a:off x="868680" y="3840480"/>
-            <a:ext cx="9692640" cy="914400"/>
-          </a:xfrm>
-          <a:prstGeom prst="rect">
-            <a:avLst/>
-          </a:prstGeom>
-          <a:noFill/>
-        </p:spPr>
-        <p:txBody>
-          <a:bodyPr wrap="square" lIns="25400" rIns="25400" tIns="12700" bIns="12700" anchor="t">
-            <a:spAutoFit/>
-          </a:bodyPr>
-          <a:lstStyle/>
-          <a:p>
-            <a:pPr algn="l">
-              <a:lnSpc>
-                <a:spcPct val="140000"/>
-              </a:lnSpc>
-            </a:pPr>
-            <a:r>
-              <a:rPr sz="1400" b="0" i="0">
-                <a:solidFill>
-                  <a:srgbClr val="6C6A64"/>
-                </a:solidFill>
-                <a:latin typeface="맑은 고딕"/>
-                <a:ea typeface="맑은 고딕"/>
-                <a:cs typeface="맑은 고딕"/>
+          <p:cNvPr id="15" name="TextBox 14"/>
+          <p:cNvSpPr txBox="1"/>
+          <p:nvPr/>
+        </p:nvSpPr>
+        <p:spPr>
+          <a:xfrm>
+            <a:off x="676656" y="3822191"/>
+            <a:ext cx="7040880" cy="822960"/>
+          </a:xfrm>
+          <a:prstGeom prst="rect">
+            <a:avLst/>
+          </a:prstGeom>
+          <a:noFill/>
+        </p:spPr>
+        <p:txBody>
+          <a:bodyPr wrap="square" anchor="t" lIns="0" rIns="0" tIns="0" bIns="0">
+            <a:spAutoFit/>
+          </a:bodyPr>
+          <a:lstStyle/>
+          <a:p>
+            <a:pPr algn="l">
+              <a:lnSpc>
+                <a:spcPct val="130000"/>
+              </a:lnSpc>
+            </a:pPr>
+            <a:r>
+              <a:rPr sz="1450" b="0">
+                <a:solidFill>
+                  <a:srgbClr val="3D3D3A"/>
+                </a:solidFill>
+                <a:latin typeface="맑은 고딕"/>
+                <a:ea typeface="맑은 고딕"/>
               </a:rPr>
               <a:t>기초 인프라는 갖췄다. 이제 검색 의도를 정확히 읽고, AI가 그대로 인용하고 싶어지는 콘텐츠를 직접 만든다.</a:t>
             </a:r>
@@ -3599,17 +3890,19 @@
       </p:sp>
       <p:sp>
         <p:nvSpPr>
-          <p:cNvPr id="8" name="Oval 7"/>
+          <p:cNvPr id="16" name="Rounded Rectangle 15"/>
           <p:cNvSpPr/>
           <p:nvPr/>
         </p:nvSpPr>
         <p:spPr>
           <a:xfrm>
-            <a:off x="886968" y="4901183"/>
-            <a:ext cx="109728" cy="109728"/>
-          </a:xfrm>
-          <a:prstGeom prst="ellipse">
-            <a:avLst/>
+            <a:off x="694944" y="4754880"/>
+            <a:ext cx="91440" cy="91440"/>
+          </a:xfrm>
+          <a:prstGeom prst="roundRect">
+            <a:avLst>
+              <a:gd name="adj" fmla="val 25000"/>
+            </a:avLst>
           </a:prstGeom>
           <a:solidFill>
             <a:srgbClr val="F37021"/>
@@ -3643,39 +3936,34 @@
       </p:sp>
       <p:sp>
         <p:nvSpPr>
-          <p:cNvPr id="9" name="TextBox 8"/>
-          <p:cNvSpPr txBox="1"/>
-          <p:nvPr/>
-        </p:nvSpPr>
-        <p:spPr>
-          <a:xfrm>
-            <a:off x="1188720" y="4846320"/>
-            <a:ext cx="9692640" cy="384048"/>
-          </a:xfrm>
-          <a:prstGeom prst="rect">
-            <a:avLst/>
-          </a:prstGeom>
-          <a:noFill/>
-        </p:spPr>
-        <p:txBody>
-          <a:bodyPr wrap="square" lIns="25400" rIns="25400" tIns="12700" bIns="12700" anchor="ctr">
-            <a:spAutoFit/>
-          </a:bodyPr>
-          <a:lstStyle/>
-          <a:p>
-            <a:pPr algn="l">
-              <a:lnSpc>
-                <a:spcPct val="125000"/>
-              </a:lnSpc>
-            </a:pPr>
-            <a:r>
-              <a:rPr sz="1200" b="0" i="0">
-                <a:solidFill>
-                  <a:srgbClr val="6C6A64"/>
-                </a:solidFill>
-                <a:latin typeface="맑은 고딕"/>
-                <a:ea typeface="맑은 고딕"/>
-                <a:cs typeface="맑은 고딕"/>
+          <p:cNvPr id="17" name="TextBox 16"/>
+          <p:cNvSpPr txBox="1"/>
+          <p:nvPr/>
+        </p:nvSpPr>
+        <p:spPr>
+          <a:xfrm>
+            <a:off x="932688" y="4663440"/>
+            <a:ext cx="6766560" cy="365760"/>
+          </a:xfrm>
+          <a:prstGeom prst="rect">
+            <a:avLst/>
+          </a:prstGeom>
+          <a:noFill/>
+        </p:spPr>
+        <p:txBody>
+          <a:bodyPr wrap="square" anchor="t" lIns="0" rIns="0" tIns="0" bIns="0">
+            <a:spAutoFit/>
+          </a:bodyPr>
+          <a:lstStyle/>
+          <a:p>
+            <a:pPr algn="l"/>
+            <a:r>
+              <a:rPr sz="1250" b="0">
+                <a:solidFill>
+                  <a:srgbClr val="252523"/>
+                </a:solidFill>
+                <a:latin typeface="맑은 고딕"/>
+                <a:ea typeface="맑은 고딕"/>
               </a:rPr>
               <a:t>콘텐츠 SEO 4대 전략 — 검색 의도부터 토픽 클러스터까지</a:t>
             </a:r>
@@ -3684,17 +3972,19 @@
       </p:sp>
       <p:sp>
         <p:nvSpPr>
-          <p:cNvPr id="10" name="Oval 9"/>
+          <p:cNvPr id="18" name="Rounded Rectangle 17"/>
           <p:cNvSpPr/>
           <p:nvPr/>
         </p:nvSpPr>
         <p:spPr>
           <a:xfrm>
-            <a:off x="886968" y="5303520"/>
-            <a:ext cx="109728" cy="109728"/>
-          </a:xfrm>
-          <a:prstGeom prst="ellipse">
-            <a:avLst/>
+            <a:off x="694944" y="5138928"/>
+            <a:ext cx="91440" cy="91440"/>
+          </a:xfrm>
+          <a:prstGeom prst="roundRect">
+            <a:avLst>
+              <a:gd name="adj" fmla="val 25000"/>
+            </a:avLst>
           </a:prstGeom>
           <a:solidFill>
             <a:srgbClr val="F37021"/>
@@ -3728,39 +4018,34 @@
       </p:sp>
       <p:sp>
         <p:nvSpPr>
-          <p:cNvPr id="11" name="TextBox 10"/>
-          <p:cNvSpPr txBox="1"/>
-          <p:nvPr/>
-        </p:nvSpPr>
-        <p:spPr>
-          <a:xfrm>
-            <a:off x="1188720" y="5248656"/>
-            <a:ext cx="9692640" cy="384048"/>
-          </a:xfrm>
-          <a:prstGeom prst="rect">
-            <a:avLst/>
-          </a:prstGeom>
-          <a:noFill/>
-        </p:spPr>
-        <p:txBody>
-          <a:bodyPr wrap="square" lIns="25400" rIns="25400" tIns="12700" bIns="12700" anchor="ctr">
-            <a:spAutoFit/>
-          </a:bodyPr>
-          <a:lstStyle/>
-          <a:p>
-            <a:pPr algn="l">
-              <a:lnSpc>
-                <a:spcPct val="125000"/>
-              </a:lnSpc>
-            </a:pPr>
-            <a:r>
-              <a:rPr sz="1200" b="0" i="0">
-                <a:solidFill>
-                  <a:srgbClr val="6C6A64"/>
-                </a:solidFill>
-                <a:latin typeface="맑은 고딕"/>
-                <a:ea typeface="맑은 고딕"/>
-                <a:cs typeface="맑은 고딕"/>
+          <p:cNvPr id="19" name="TextBox 18"/>
+          <p:cNvSpPr txBox="1"/>
+          <p:nvPr/>
+        </p:nvSpPr>
+        <p:spPr>
+          <a:xfrm>
+            <a:off x="932688" y="5047488"/>
+            <a:ext cx="6766560" cy="365760"/>
+          </a:xfrm>
+          <a:prstGeom prst="rect">
+            <a:avLst/>
+          </a:prstGeom>
+          <a:noFill/>
+        </p:spPr>
+        <p:txBody>
+          <a:bodyPr wrap="square" anchor="t" lIns="0" rIns="0" tIns="0" bIns="0">
+            <a:spAutoFit/>
+          </a:bodyPr>
+          <a:lstStyle/>
+          <a:p>
+            <a:pPr algn="l"/>
+            <a:r>
+              <a:rPr sz="1250" b="0">
+                <a:solidFill>
+                  <a:srgbClr val="252523"/>
+                </a:solidFill>
+                <a:latin typeface="맑은 고딕"/>
+                <a:ea typeface="맑은 고딕"/>
               </a:rPr>
               <a:t>Intent Gap과 Information Gain으로 차별화하는 법</a:t>
             </a:r>
@@ -3769,17 +4054,19 @@
       </p:sp>
       <p:sp>
         <p:nvSpPr>
-          <p:cNvPr id="12" name="Oval 11"/>
+          <p:cNvPr id="20" name="Rounded Rectangle 19"/>
           <p:cNvSpPr/>
           <p:nvPr/>
         </p:nvSpPr>
         <p:spPr>
           <a:xfrm>
-            <a:off x="886968" y="5705856"/>
-            <a:ext cx="109728" cy="109728"/>
-          </a:xfrm>
-          <a:prstGeom prst="ellipse">
-            <a:avLst/>
+            <a:off x="694944" y="5522976"/>
+            <a:ext cx="91440" cy="91440"/>
+          </a:xfrm>
+          <a:prstGeom prst="roundRect">
+            <a:avLst>
+              <a:gd name="adj" fmla="val 25000"/>
+            </a:avLst>
           </a:prstGeom>
           <a:solidFill>
             <a:srgbClr val="F37021"/>
@@ -3813,39 +4100,34 @@
       </p:sp>
       <p:sp>
         <p:nvSpPr>
-          <p:cNvPr id="13" name="TextBox 12"/>
-          <p:cNvSpPr txBox="1"/>
-          <p:nvPr/>
-        </p:nvSpPr>
-        <p:spPr>
-          <a:xfrm>
-            <a:off x="1188720" y="5650992"/>
-            <a:ext cx="9692640" cy="384048"/>
-          </a:xfrm>
-          <a:prstGeom prst="rect">
-            <a:avLst/>
-          </a:prstGeom>
-          <a:noFill/>
-        </p:spPr>
-        <p:txBody>
-          <a:bodyPr wrap="square" lIns="25400" rIns="25400" tIns="12700" bIns="12700" anchor="ctr">
-            <a:spAutoFit/>
-          </a:bodyPr>
-          <a:lstStyle/>
-          <a:p>
-            <a:pPr algn="l">
-              <a:lnSpc>
-                <a:spcPct val="125000"/>
-              </a:lnSpc>
-            </a:pPr>
-            <a:r>
-              <a:rPr sz="1200" b="0" i="0">
-                <a:solidFill>
-                  <a:srgbClr val="6C6A64"/>
-                </a:solidFill>
-                <a:latin typeface="맑은 고딕"/>
-                <a:ea typeface="맑은 고딕"/>
-                <a:cs typeface="맑은 고딕"/>
+          <p:cNvPr id="21" name="TextBox 20"/>
+          <p:cNvSpPr txBox="1"/>
+          <p:nvPr/>
+        </p:nvSpPr>
+        <p:spPr>
+          <a:xfrm>
+            <a:off x="932688" y="5431536"/>
+            <a:ext cx="6766560" cy="365760"/>
+          </a:xfrm>
+          <a:prstGeom prst="rect">
+            <a:avLst/>
+          </a:prstGeom>
+          <a:noFill/>
+        </p:spPr>
+        <p:txBody>
+          <a:bodyPr wrap="square" anchor="t" lIns="0" rIns="0" tIns="0" bIns="0">
+            <a:spAutoFit/>
+          </a:bodyPr>
+          <a:lstStyle/>
+          <a:p>
+            <a:pPr algn="l"/>
+            <a:r>
+              <a:rPr sz="1250" b="0">
+                <a:solidFill>
+                  <a:srgbClr val="252523"/>
+                </a:solidFill>
+                <a:latin typeface="맑은 고딕"/>
+                <a:ea typeface="맑은 고딕"/>
               </a:rPr>
               <a:t>AEO 실전 3단계 — 질문 수집·역피라미드·FAQ 구조화</a:t>
             </a:r>
@@ -3854,17 +4136,19 @@
       </p:sp>
       <p:sp>
         <p:nvSpPr>
-          <p:cNvPr id="14" name="Oval 13"/>
+          <p:cNvPr id="22" name="Rounded Rectangle 21"/>
           <p:cNvSpPr/>
           <p:nvPr/>
         </p:nvSpPr>
         <p:spPr>
           <a:xfrm>
-            <a:off x="886968" y="6108192"/>
-            <a:ext cx="109728" cy="109728"/>
-          </a:xfrm>
-          <a:prstGeom prst="ellipse">
-            <a:avLst/>
+            <a:off x="694944" y="5907024"/>
+            <a:ext cx="91440" cy="91440"/>
+          </a:xfrm>
+          <a:prstGeom prst="roundRect">
+            <a:avLst>
+              <a:gd name="adj" fmla="val 25000"/>
+            </a:avLst>
           </a:prstGeom>
           <a:solidFill>
             <a:srgbClr val="F37021"/>
@@ -3898,39 +4182,34 @@
       </p:sp>
       <p:sp>
         <p:nvSpPr>
-          <p:cNvPr id="15" name="TextBox 14"/>
-          <p:cNvSpPr txBox="1"/>
-          <p:nvPr/>
-        </p:nvSpPr>
-        <p:spPr>
-          <a:xfrm>
-            <a:off x="1188720" y="6053328"/>
-            <a:ext cx="9692640" cy="384048"/>
-          </a:xfrm>
-          <a:prstGeom prst="rect">
-            <a:avLst/>
-          </a:prstGeom>
-          <a:noFill/>
-        </p:spPr>
-        <p:txBody>
-          <a:bodyPr wrap="square" lIns="25400" rIns="25400" tIns="12700" bIns="12700" anchor="ctr">
-            <a:spAutoFit/>
-          </a:bodyPr>
-          <a:lstStyle/>
-          <a:p>
-            <a:pPr algn="l">
-              <a:lnSpc>
-                <a:spcPct val="125000"/>
-              </a:lnSpc>
-            </a:pPr>
-            <a:r>
-              <a:rPr sz="1200" b="0" i="0">
-                <a:solidFill>
-                  <a:srgbClr val="6C6A64"/>
-                </a:solidFill>
-                <a:latin typeface="맑은 고딕"/>
-                <a:ea typeface="맑은 고딕"/>
-                <a:cs typeface="맑은 고딕"/>
+          <p:cNvPr id="23" name="TextBox 22"/>
+          <p:cNvSpPr txBox="1"/>
+          <p:nvPr/>
+        </p:nvSpPr>
+        <p:spPr>
+          <a:xfrm>
+            <a:off x="932688" y="5815584"/>
+            <a:ext cx="6766560" cy="365760"/>
+          </a:xfrm>
+          <a:prstGeom prst="rect">
+            <a:avLst/>
+          </a:prstGeom>
+          <a:noFill/>
+        </p:spPr>
+        <p:txBody>
+          <a:bodyPr wrap="square" anchor="t" lIns="0" rIns="0" tIns="0" bIns="0">
+            <a:spAutoFit/>
+          </a:bodyPr>
+          <a:lstStyle/>
+          <a:p>
+            <a:pPr algn="l"/>
+            <a:r>
+              <a:rPr sz="1250" b="0">
+                <a:solidFill>
+                  <a:srgbClr val="252523"/>
+                </a:solidFill>
+                <a:latin typeface="맑은 고딕"/>
+                <a:ea typeface="맑은 고딕"/>
               </a:rPr>
               <a:t>GEO 콘텐츠 심화 — Executive Summary와 독창적 프레임워크</a:t>
             </a:r>
@@ -3939,41 +4218,116 @@
       </p:sp>
       <p:sp>
         <p:nvSpPr>
-          <p:cNvPr id="16" name="TextBox 15"/>
-          <p:cNvSpPr txBox="1"/>
-          <p:nvPr/>
-        </p:nvSpPr>
-        <p:spPr>
-          <a:xfrm>
-            <a:off x="868680" y="6437376"/>
-            <a:ext cx="8229600" cy="274320"/>
-          </a:xfrm>
-          <a:prstGeom prst="rect">
-            <a:avLst/>
-          </a:prstGeom>
-          <a:noFill/>
-        </p:spPr>
-        <p:txBody>
-          <a:bodyPr wrap="square" lIns="25400" rIns="25400" tIns="12700" bIns="12700" anchor="t">
-            <a:spAutoFit/>
-          </a:bodyPr>
-          <a:lstStyle/>
-          <a:p>
-            <a:pPr algn="l">
-              <a:lnSpc>
-                <a:spcPct val="115000"/>
-              </a:lnSpc>
-            </a:pPr>
-            <a:r>
-              <a:rPr sz="850" b="0" i="0" spc="100">
+          <p:cNvPr id="24" name="Rectangle 23"/>
+          <p:cNvSpPr/>
+          <p:nvPr/>
+        </p:nvSpPr>
+        <p:spPr>
+          <a:xfrm>
+            <a:off x="658368" y="6419088"/>
+            <a:ext cx="10890504" cy="9144"/>
+          </a:xfrm>
+          <a:prstGeom prst="rect">
+            <a:avLst/>
+          </a:prstGeom>
+          <a:solidFill>
+            <a:srgbClr val="E6DFD8"/>
+          </a:solidFill>
+          <a:ln>
+            <a:noFill/>
+          </a:ln>
+          <a:effectLst/>
+        </p:spPr>
+        <p:style>
+          <a:lnRef idx="1">
+            <a:schemeClr val="accent1"/>
+          </a:lnRef>
+          <a:fillRef idx="3">
+            <a:schemeClr val="accent1"/>
+          </a:fillRef>
+          <a:effectRef idx="2">
+            <a:schemeClr val="accent1"/>
+          </a:effectRef>
+          <a:fontRef idx="minor">
+            <a:schemeClr val="lt1"/>
+          </a:fontRef>
+        </p:style>
+        <p:txBody>
+          <a:bodyPr rtlCol="0" anchor="ctr"/>
+          <a:lstStyle/>
+          <a:p>
+            <a:pPr algn="ctr"/>
+          </a:p>
+        </p:txBody>
+      </p:sp>
+      <p:sp>
+        <p:nvSpPr>
+          <p:cNvPr id="25" name="TextBox 24"/>
+          <p:cNvSpPr txBox="1"/>
+          <p:nvPr/>
+        </p:nvSpPr>
+        <p:spPr>
+          <a:xfrm>
+            <a:off x="658368" y="6473952"/>
+            <a:ext cx="6400800" cy="274320"/>
+          </a:xfrm>
+          <a:prstGeom prst="rect">
+            <a:avLst/>
+          </a:prstGeom>
+          <a:noFill/>
+        </p:spPr>
+        <p:txBody>
+          <a:bodyPr wrap="square" anchor="t" lIns="0" rIns="0" tIns="0" bIns="0">
+            <a:spAutoFit/>
+          </a:bodyPr>
+          <a:lstStyle/>
+          <a:p>
+            <a:pPr algn="l"/>
+            <a:r>
+              <a:rPr sz="900" b="0" spc="50">
                 <a:solidFill>
                   <a:srgbClr val="8E8B82"/>
                 </a:solidFill>
                 <a:latin typeface="맑은 고딕"/>
                 <a:ea typeface="맑은 고딕"/>
-                <a:cs typeface="맑은 고딕"/>
-              </a:rPr>
-              <a:t>AI 검색 시대 마케팅 — SEO·AEO·GEO 6강 완성 과정</a:t>
+              </a:rPr>
+              <a:t>SEO · AEO · GEO — AI 검색 시대 마케팅</a:t>
+            </a:r>
+          </a:p>
+        </p:txBody>
+      </p:sp>
+      <p:sp>
+        <p:nvSpPr>
+          <p:cNvPr id="26" name="TextBox 25"/>
+          <p:cNvSpPr txBox="1"/>
+          <p:nvPr/>
+        </p:nvSpPr>
+        <p:spPr>
+          <a:xfrm>
+            <a:off x="8229600" y="6473952"/>
+            <a:ext cx="3319272" cy="274320"/>
+          </a:xfrm>
+          <a:prstGeom prst="rect">
+            <a:avLst/>
+          </a:prstGeom>
+          <a:noFill/>
+        </p:spPr>
+        <p:txBody>
+          <a:bodyPr wrap="square" anchor="t" lIns="0" rIns="0" tIns="0" bIns="0">
+            <a:spAutoFit/>
+          </a:bodyPr>
+          <a:lstStyle/>
+          <a:p>
+            <a:pPr algn="r"/>
+            <a:r>
+              <a:rPr sz="900" b="0" spc="80">
+                <a:solidFill>
+                  <a:srgbClr val="8E8B82"/>
+                </a:solidFill>
+                <a:latin typeface="맑은 고딕"/>
+                <a:ea typeface="맑은 고딕"/>
+              </a:rPr>
+              <a:t>04 / 06</a:t>
             </a:r>
           </a:p>
         </p:txBody>
